--- a/docs/ecostats_lectures/lecture_18/18_01_lecture_powerpoint.pptx
+++ b/docs/ecostats_lectures/lecture_18/18_01_lecture_powerpoint.pptx
@@ -3402,8 +3402,11 @@
         <p:spPr>
           <a:xfrm>
             <a:off x="0" y="0"/>
-            <a:ext cx="9144000" cy="582780"/>
+            <a:ext cx="9144000" cy="602780"/>
           </a:xfrm>
+          <a:solidFill>
+            <a:srgbClr val="70121D"/>
+          </a:solidFill>
         </p:spPr>
         <p:txBody>
           <a:bodyPr/>
@@ -3426,7 +3429,7 @@
             <a:spLocks noGrp="1"/>
           </p:cNvSpPr>
           <p:nvPr>
-            <p:ph idx="1"/>
+            <p:ph idx="1" sz="half"/>
           </p:nvPr>
         </p:nvSpPr>
         <p:spPr/>
@@ -3465,14 +3468,14 @@
             <a:pPr lvl="1"/>
             <a:r>
               <a:rPr/>
-              <a:t>stepped line is a monotonic regression, meaning it can only go up or stay flat, never down</a:t>
-            </a:r>
-          </a:p>
-          <a:p>
-            <a:pPr lvl="1"/>
-            <a:r>
-              <a:rPr/>
-              <a:t>because NMDS preserves rank order - “stress” value quantifies scatter around line</a:t>
+              <a:t>stepped line is a monotonic regression, = can only go up/stay flat not down</a:t>
+            </a:r>
+          </a:p>
+          <a:p>
+            <a:pPr lvl="1"/>
+            <a:r>
+              <a:rPr/>
+              <a:t>because NMDS preserves rank order - “stress” = scatter around line</a:t>
             </a:r>
           </a:p>
           <a:p>
@@ -3486,67 +3489,90 @@
             <a:pPr lvl="1"/>
             <a:r>
               <a:rPr/>
-              <a:t>There’s minimal scatter, especially at low dissimilarities</a:t>
-            </a:r>
-          </a:p>
-          <a:p>
-            <a:pPr lvl="1"/>
-            <a:r>
-              <a:rPr/>
-              <a:t>indicates this 2D solution captures the community relationships well</a:t>
-            </a:r>
-          </a:p>
-          <a:p>
-            <a:pPr lvl="1"/>
+              <a:t>minimal scatter</a:t>
+            </a:r>
+          </a:p>
+          <a:p>
+            <a:pPr lvl="0"/>
             <a:r>
               <a:rPr b="1"/>
               <a:t>Stress Guidelines</a:t>
             </a:r>
           </a:p>
           <a:p>
+            <a:pPr lvl="1"/>
+            <a:r>
+              <a:rPr/>
+              <a:t>Clarke (1993) widely-used guidelines for interpreting stress</a:t>
+            </a:r>
+          </a:p>
+          <a:p>
             <a:pPr lvl="2"/>
             <a:r>
               <a:rPr/>
-              <a:t>Clarke (1993) provided widely-used guidelines for interpreting stress values</a:t>
-            </a:r>
-          </a:p>
-          <a:p>
-            <a:pPr lvl="3"/>
-            <a:r>
-              <a:rPr/>
-              <a:t>below 0.05 considered excellent representation w/no misinterpretation</a:t>
-            </a:r>
-          </a:p>
-          <a:p>
-            <a:pPr lvl="3"/>
-            <a:r>
-              <a:rPr/>
-              <a:t>0.05 - 0.10 good ordination with no real risk of drawing false inferences</a:t>
-            </a:r>
-          </a:p>
-          <a:p>
-            <a:pPr lvl="3"/>
+              <a:t>&lt;0.05 excellent representation w/no misinterpretation</a:t>
+            </a:r>
+          </a:p>
+          <a:p>
+            <a:pPr lvl="2"/>
+            <a:r>
+              <a:rPr/>
+              <a:t>0.05 - 0.10 good ordination - no real risk of false inferences</a:t>
+            </a:r>
+          </a:p>
+          <a:p>
+            <a:pPr lvl="2"/>
             <a:r>
               <a:rPr/>
               <a:t>0.10 - 0.20 usable ordination but details at lower end interpreted cautiously</a:t>
             </a:r>
           </a:p>
           <a:p>
-            <a:pPr lvl="3"/>
-            <a:r>
-              <a:rPr/>
-              <a:t>0.20 and 0.30 used with caution/ potentially higher dimensions considered</a:t>
-            </a:r>
-          </a:p>
-          <a:p>
-            <a:pPr lvl="3"/>
-            <a:r>
-              <a:rPr/>
-              <a:t>&gt;0.30 is essentially random placement.</a:t>
-            </a:r>
-          </a:p>
-        </p:txBody>
-      </p:sp>
+            <a:pPr lvl="2"/>
+            <a:r>
+              <a:rPr/>
+              <a:t>0.20 and 0.30 used with caution/potentially higher dimensions considered</a:t>
+            </a:r>
+          </a:p>
+          <a:p>
+            <a:pPr lvl="2"/>
+            <a:r>
+              <a:rPr/>
+              <a:t>&gt;0.30 = random placement.</a:t>
+            </a:r>
+          </a:p>
+        </p:txBody>
+      </p:sp>
+      <p:pic>
+        <p:nvPicPr>
+          <p:cNvPr descr="18_01_lecture_powerpoint_files/figure-pptx/shepard-diagram-1.png" id="0" name="Picture 1"/>
+          <p:cNvPicPr>
+            <a:picLocks noGrp="1" noChangeAspect="1"/>
+          </p:cNvPicPr>
+          <p:nvPr/>
+        </p:nvPicPr>
+        <p:blipFill>
+          <a:blip r:embed="rId2"/>
+          <a:stretch>
+            <a:fillRect/>
+          </a:stretch>
+        </p:blipFill>
+        <p:spPr bwMode="auto">
+          <a:xfrm>
+            <a:off x="6121400" y="2044700"/>
+            <a:ext cx="2781300" cy="1714500"/>
+          </a:xfrm>
+          <a:prstGeom prst="rect">
+            <a:avLst/>
+          </a:prstGeom>
+          <a:noFill/>
+          <a:ln w="9525">
+            <a:noFill/>
+            <a:headEnd/>
+            <a:tailEnd/>
+          </a:ln>
+        </p:spPr>
+      </p:pic>
     </p:spTree>
   </p:cSld>
 </p:sld>
@@ -4775,6 +4801,24 @@
               <a:rPr>
                 <a:latin typeface="Courier"/>
               </a:rPr>
+              <a:t>fish_nmds &lt;- metaMDS(spe_matrix, distance = "bray", # Bray-Curtis dissimilarity</a:t>
+            </a:r>
+          </a:p>
+          <a:p>
+            <a:pPr lvl="1"/>
+            <a:r>
+              <a:rPr>
+                <a:latin typeface="Courier"/>
+              </a:rPr>
+              <a:t>k = 2, trymax = 100) # 2 dimensions + Maximum tries</a:t>
+            </a:r>
+          </a:p>
+          <a:p>
+            <a:pPr lvl="0"/>
+            <a:r>
+              <a:rPr>
+                <a:latin typeface="Courier"/>
+              </a:rPr>
               <a:t>metaMDS()</a:t>
             </a:r>
             <a:r>
@@ -5193,7 +5237,7 @@
             </a:pPr>
             <a:r>
               <a:rPr/>
-              <a:t>different plot using the actual hull definitions from vegan</a:t>
+              <a:t>Different plot using the actual hull definitions from vegan</a:t>
             </a:r>
           </a:p>
         </p:txBody>
@@ -5730,61 +5774,58 @@
             <a:pPr lvl="0"/>
             <a:r>
               <a:rPr/>
-              <a:t>encounter data that is sparse (most species are absent from most sites)</a:t>
+              <a:t>encounter data that is sparse (most species are absent from most sites) - many zeros</a:t>
             </a:r>
           </a:p>
           <a:p>
             <a:pPr lvl="0"/>
             <a:r>
               <a:rPr/>
-              <a:t>contains many zeros</a:t>
+              <a:t>exhibits non-linear relationships between species and environmental gradients</a:t>
             </a:r>
           </a:p>
           <a:p>
             <a:pPr lvl="0"/>
             <a:r>
               <a:rPr/>
-              <a:t>exhibits non-linear relationships between species and environmental gradients</a:t>
+              <a:t>has no clear distributional form</a:t>
             </a:r>
           </a:p>
           <a:p>
             <a:pPr lvl="0"/>
             <a:r>
               <a:rPr/>
-              <a:t>has no clear distributional form</a:t>
+              <a:t>Principal Components Analysis (PCA) works beautifully for continuous environmental variables</a:t>
+            </a:r>
+          </a:p>
+          <a:p>
+            <a:pPr lvl="1"/>
+            <a:r>
+              <a:rPr/>
+              <a:t>assumes linear relationships</a:t>
+            </a:r>
+          </a:p>
+          <a:p>
+            <a:pPr lvl="1"/>
+            <a:r>
+              <a:rPr/>
+              <a:t>can leverage correlations between variables</a:t>
+            </a:r>
+          </a:p>
+          <a:p>
+            <a:pPr lvl="1"/>
+            <a:r>
+              <a:rPr/>
+              <a:t>for species abundance data - assumptions often fail </a:t>
+            </a:r>
+            <a:r>
+              <a:rPr b="1" i="1"/>
+              <a:t>spectacularly</a:t>
             </a:r>
           </a:p>
           <a:p>
             <a:pPr lvl="0"/>
             <a:r>
-              <a:rPr/>
-              <a:t>Principal Components Analysis (PCA) works beautifully for continuous environmental variables</a:t>
-            </a:r>
-          </a:p>
-          <a:p>
-            <a:pPr lvl="1"/>
-            <a:r>
-              <a:rPr/>
-              <a:t>assumes linear relationships</a:t>
-            </a:r>
-          </a:p>
-          <a:p>
-            <a:pPr lvl="1"/>
-            <a:r>
-              <a:rPr/>
-              <a:t>can leverage correlations between variables</a:t>
-            </a:r>
-          </a:p>
-          <a:p>
-            <a:pPr lvl="1"/>
-            <a:r>
-              <a:rPr/>
-              <a:t>for species abundance data - assumptions often fail spectacularly</a:t>
-            </a:r>
-          </a:p>
-          <a:p>
-            <a:pPr lvl="0"/>
-            <a:r>
               <a:rPr b="1"/>
               <a:t>NMDS offers a fundamentally different approach</a:t>
             </a:r>
@@ -5797,21 +5838,25 @@
             <a:pPr lvl="1"/>
             <a:r>
               <a:rPr/>
-              <a:t>instead of trying to preserve exact distances or maximize variance explained,</a:t>
-            </a:r>
-          </a:p>
-          <a:p>
-            <a:pPr lvl="1"/>
-            <a:r>
-              <a:rPr/>
-              <a:t>focuses on preserving the </a:t>
-            </a:r>
-            <a:r>
-              <a:rPr i="1"/>
+              <a:t>instead of trying to preserve exact distances or maximize variance explained</a:t>
+            </a:r>
+          </a:p>
+          <a:p>
+            <a:pPr lvl="1"/>
+            <a:r>
+              <a:rPr/>
+              <a:t>focuses on </a:t>
+            </a:r>
+            <a:r>
+              <a:rPr b="1"/>
+              <a:t>preserving the </a:t>
+            </a:r>
+            <a:r>
+              <a:rPr b="1" i="1"/>
               <a:t>rank order</a:t>
             </a:r>
             <a:r>
-              <a:rPr/>
+              <a:rPr b="1"/>
               <a:t> of similarities between samples</a:t>
             </a:r>
           </a:p>
@@ -5916,36 +5961,43 @@
             </a:r>
           </a:p>
           <a:p>
+            <a:pPr lvl="1"/>
+            <a:r>
+              <a:rPr b="1"/>
+              <a:t>H₀</a:t>
+            </a:r>
+            <a:r>
+              <a:rPr/>
+              <a:t>: The centroids of fish communities are the same across all river reaches (Upper = Middle = Lower)</a:t>
+            </a:r>
+          </a:p>
+          <a:p>
+            <a:pPr lvl="1"/>
+            <a:r>
+              <a:rPr b="1"/>
+              <a:t>H₁</a:t>
+            </a:r>
+            <a:r>
+              <a:rPr/>
+              <a:t>: At least one river reach has a different community centroid</a:t>
+            </a:r>
+          </a:p>
+          <a:p>
             <a:pPr lvl="0"/>
             <a:r>
               <a:rPr b="1"/>
-              <a:t>H₀</a:t>
-            </a:r>
-            <a:r>
-              <a:rPr/>
-              <a:t>: The centroids of fish communities are the same across all river reaches (Upper = Middle = Lower)</a:t>
-            </a:r>
-          </a:p>
-          <a:p>
-            <a:pPr lvl="0"/>
-            <a:r>
-              <a:rPr b="1"/>
-              <a:t>H₁</a:t>
-            </a:r>
-            <a:r>
-              <a:rPr/>
-              <a:t>: At least one river reach has a different community centroid</a:t>
-            </a:r>
-          </a:p>
-          <a:p>
-            <a:pPr lvl="0"/>
-            <a:r>
-              <a:rPr b="1"/>
               <a:t>In practical terms:</a:t>
             </a:r>
             <a:r>
               <a:rPr/>
-              <a:t> - H₀: River position doesn’t affect community composition</a:t>
+              <a:t> -</a:t>
+            </a:r>
+          </a:p>
+          <a:p>
+            <a:pPr lvl="1"/>
+            <a:r>
+              <a:rPr/>
+              <a:t>H₀: River position doesn’t affect community composition</a:t>
             </a:r>
           </a:p>
           <a:p>
@@ -6021,12 +6073,9 @@
         </p:nvSpPr>
         <p:spPr>
           <a:xfrm>
-            <a:off x="0" y="0"/>
-            <a:ext cx="9144000" cy="602780"/>
+            <a:off x="139485" y="78119"/>
+            <a:ext cx="8229600" cy="607682"/>
           </a:xfrm>
-          <a:solidFill>
-            <a:srgbClr val="70121D"/>
-          </a:solidFill>
         </p:spPr>
         <p:txBody>
           <a:bodyPr/>
@@ -6044,12 +6093,12 @@
       </p:sp>
       <p:sp>
         <p:nvSpPr>
-          <p:cNvPr id="3" name="Content Placeholder 2"/>
-          <p:cNvSpPr>
-            <a:spLocks noGrp="1"/>
-          </p:cNvSpPr>
-          <p:nvPr>
-            <p:ph idx="1" sz="half"/>
+          <p:cNvPr id="3" name="Text Placeholder 2"/>
+          <p:cNvSpPr>
+            <a:spLocks noGrp="1"/>
+          </p:cNvSpPr>
+          <p:nvPr>
+            <p:ph idx="1" type="body"/>
           </p:nvPr>
         </p:nvSpPr>
         <p:spPr/>
@@ -6148,17 +6197,17 @@
           <a:p>
             <a:pPr lvl="1"/>
             <a:r>
-              <a:rPr/>
+              <a:rPr b="1"/>
               <a:t>Use </a:t>
             </a:r>
             <a:r>
-              <a:rPr>
+              <a:rPr b="1">
                 <a:latin typeface="Courier"/>
               </a:rPr>
               <a:t>betadisper()</a:t>
             </a:r>
             <a:r>
-              <a:rPr/>
+              <a:rPr b="1"/>
               <a:t> to test homogeneity of dispersion</a:t>
             </a:r>
           </a:p>
@@ -6166,7 +6215,7 @@
             <a:pPr lvl="1"/>
             <a:r>
               <a:rPr/>
-              <a:t>If violated, PERMANOVA tests dispersion differences, not location differences</a:t>
+              <a:t>If violated, PERMANOVA is testing dispersion differences and not location differences</a:t>
             </a:r>
           </a:p>
           <a:p>
@@ -6178,6 +6227,36 @@
                 <a:latin typeface="Courier"/>
               </a:rPr>
               <a:t>## Homogeneity of dispersion test p-value: 0.8037</a:t>
+            </a:r>
+          </a:p>
+        </p:txBody>
+      </p:sp>
+      <p:sp>
+        <p:nvSpPr>
+          <p:cNvPr id="5" name="Text Placeholder 4"/>
+          <p:cNvSpPr>
+            <a:spLocks noGrp="1"/>
+          </p:cNvSpPr>
+          <p:nvPr>
+            <p:ph idx="3" sz="quarter" type="body"/>
+          </p:nvPr>
+        </p:nvSpPr>
+        <p:spPr/>
+        <p:txBody>
+          <a:bodyPr/>
+          <a:lstStyle/>
+          <a:p>
+            <a:pPr lvl="0"/>
+            <a:r>
+              <a:rPr/>
+              <a:t>vegan::betadisper() converts bray-curtis to euclidean distances to calculate distance from sample to center</a:t>
+            </a:r>
+          </a:p>
+          <a:p>
+            <a:pPr lvl="0"/>
+            <a:r>
+              <a:rPr/>
+              <a:t>Principal Coordinates Analysis (PCoA) - ordination for distances between samples in a low-dimensional, Euclidean space</a:t>
             </a:r>
           </a:p>
         </p:txBody>
@@ -6198,8 +6277,8 @@
         </p:blipFill>
         <p:spPr bwMode="auto">
           <a:xfrm>
-            <a:off x="6121400" y="1231900"/>
-            <a:ext cx="2781300" cy="3340100"/>
+            <a:off x="5410200" y="1295400"/>
+            <a:ext cx="2730500" cy="3276600"/>
           </a:xfrm>
           <a:prstGeom prst="rect">
             <a:avLst/>
@@ -6287,17 +6366,16 @@
               <a:rPr b="1"/>
               <a:t>PERMANOVA on Fish Communities</a:t>
             </a:r>
-            <a:r>
-              <a:rPr/>
-              <a:t> - </a:t>
-            </a:r>
+          </a:p>
+          <a:p>
+            <a:pPr lvl="1"/>
             <a:r>
               <a:rPr b="1"/>
               <a:t>Line-by-line interpretation:</a:t>
             </a:r>
           </a:p>
           <a:p>
-            <a:pPr lvl="1" indent="-342900" marL="685800">
+            <a:pPr lvl="2" indent="-342900" marL="1028700">
               <a:buAutoNum type="arabicPeriod"/>
             </a:pPr>
             <a:r>
@@ -6310,7 +6388,7 @@
             </a:r>
           </a:p>
           <a:p>
-            <a:pPr lvl="1" indent="-342900" marL="685800">
+            <a:pPr lvl="2" indent="-342900" marL="1028700">
               <a:buAutoNum type="arabicPeriod"/>
             </a:pPr>
             <a:r>
@@ -6323,7 +6401,7 @@
             </a:r>
           </a:p>
           <a:p>
-            <a:pPr lvl="1" indent="-342900" marL="685800">
+            <a:pPr lvl="2" indent="-342900" marL="1028700">
               <a:buAutoNum type="arabicPeriod"/>
             </a:pPr>
             <a:r>
@@ -6336,7 +6414,7 @@
             </a:r>
           </a:p>
           <a:p>
-            <a:pPr lvl="1" indent="-342900" marL="685800">
+            <a:pPr lvl="2" indent="-342900" marL="1028700">
               <a:buAutoNum type="arabicPeriod"/>
             </a:pPr>
             <a:r>
@@ -6349,7 +6427,7 @@
             </a:r>
           </a:p>
           <a:p>
-            <a:pPr lvl="1" indent="-342900" marL="685800">
+            <a:pPr lvl="2" indent="-342900" marL="1028700">
               <a:buAutoNum type="arabicPeriod"/>
             </a:pPr>
             <a:r>
@@ -6362,7 +6440,7 @@
             </a:r>
           </a:p>
           <a:p>
-            <a:pPr lvl="1" indent="-342900" marL="685800">
+            <a:pPr lvl="2" indent="-342900" marL="1028700">
               <a:buAutoNum type="arabicPeriod"/>
             </a:pPr>
             <a:r>
@@ -6571,7 +6649,7 @@
             <a:pPr lvl="1"/>
             <a:r>
               <a:rPr/>
-              <a:t>Each comparison explains a substantial portion of variance (R² &gt; 0.3)</a:t>
+              <a:t>Downstream comparisons to up and middle explains a substantial portion of variance (R² &gt; 0.3)</a:t>
             </a:r>
           </a:p>
           <a:p>
@@ -6593,12 +6671,14 @@
               <a:rPr>
                 <a:latin typeface="Courier"/>
               </a:rPr>
-              <a:t>## # A tibble: 3 × 6
-##   comparison              F_stat    R2 p_value p_adjusted significant
-##   &lt;chr&gt;                    &lt;dbl&gt; &lt;dbl&gt;   &lt;dbl&gt;      &lt;dbl&gt; &lt;chr&gt;      
-## 1 Upstream vs Midstream     3.44 0.168   0.017      0.051 No         
-## 2 Upstream vs Downstream   15.5  0.477   0.001      0.003 Yes        
-## 3 Midstream vs Downstream   9.97 0.357   0.002      0.006 Yes</a:t>
+              <a:t>##                     pairs Df SumsOfSqs   F.Model        R2 p.value p.adjusted
+## 1   Upstream vs Midstream  1 0.4068962  3.434528 0.1680747   0.021      0.063
+## 2  Upstream vs Downstream  1 1.8495110 15.490360 0.4767679   0.001      0.003
+## 3 Midstream vs Downstream  1 1.2829784  9.972485 0.3565105   0.001      0.003
+##   sig
+## 1    
+## 2   *
+## 3   *</a:t>
             </a:r>
           </a:p>
         </p:txBody>
@@ -6758,13 +6838,6 @@
             <a:pPr lvl="0"/>
             <a:r>
               <a:rPr b="1"/>
-              <a:t>What is ANOSIM?</a:t>
-            </a:r>
-          </a:p>
-          <a:p>
-            <a:pPr lvl="0"/>
-            <a:r>
-              <a:rPr b="1"/>
               <a:t>ANOSIM (Analysis of Similarities):</a:t>
             </a:r>
           </a:p>
@@ -6776,7 +6849,7 @@
             </a:r>
             <a:r>
               <a:rPr/>
-              <a:t>: Test whether samples within groups are more similar than samples between groups</a:t>
+              <a:t>: are samples w/in groups are more similar than samples between groups</a:t>
             </a:r>
           </a:p>
           <a:p>
@@ -6879,8 +6952,8 @@
         </p:blipFill>
         <p:spPr bwMode="auto">
           <a:xfrm>
-            <a:off x="6121400" y="2044700"/>
-            <a:ext cx="2781300" cy="1714500"/>
+            <a:off x="6121400" y="1498600"/>
+            <a:ext cx="2781300" cy="2781300"/>
           </a:xfrm>
           <a:prstGeom prst="rect">
             <a:avLst/>
@@ -7453,7 +7526,7 @@
             </a:r>
             <a:r>
               <a:rPr/>
-              <a:t> : This indicates “good”nseparation between groups</a:t>
+              <a:t> : This indicates “good” separation between groups</a:t>
             </a:r>
           </a:p>
           <a:p>
@@ -7471,7 +7544,7 @@
             </a:r>
             <a:r>
               <a:rPr/>
-              <a:t>: Fish communities are well-separated between river reaches, with communities within each reach being much more similar to each other than to communities in other reaches</a:t>
+              <a:t>: Fish communities well-separated between river reaches, with communities within each reach being much more similar to each other than to communities in other reaches</a:t>
             </a:r>
           </a:p>
           <a:p>
@@ -7492,7 +7565,14 @@
             <a:pPr lvl="1"/>
             <a:r>
               <a:rPr/>
-              <a:t>R statistic of 0.51 quantifies this separation—there’s clear differentiation, but with some overlap.</a:t>
+              <a:t>R statistic of 0.51 quantifies this separation</a:t>
+            </a:r>
+          </a:p>
+          <a:p>
+            <a:pPr lvl="2"/>
+            <a:r>
+              <a:rPr/>
+              <a:t>there’s clear differentiation, but with some overlap.</a:t>
             </a:r>
           </a:p>
         </p:txBody>
@@ -7529,7 +7609,7 @@
             <a:pPr lvl="2"/>
             <a:r>
               <a:rPr/>
-              <a:t>all within-group dissimilarities are smaller than all between-group dissimilarities</a:t>
+              <a:t>all within-group dissimilarities smaller than between-group dissimilarities</a:t>
             </a:r>
           </a:p>
           <a:p>
@@ -7759,35 +7839,35 @@
             </a:r>
           </a:p>
           <a:p>
-            <a:pPr lvl="0"/>
+            <a:pPr lvl="1"/>
             <a:r>
               <a:rPr b="1"/>
               <a:t>ANOSIM:</a:t>
             </a:r>
           </a:p>
           <a:p>
-            <a:pPr lvl="1"/>
+            <a:pPr lvl="2"/>
             <a:r>
               <a:rPr/>
               <a:t>More robust to outliers</a:t>
             </a:r>
           </a:p>
           <a:p>
-            <a:pPr lvl="1"/>
+            <a:pPr lvl="2"/>
             <a:r>
               <a:rPr/>
               <a:t>Simpler interpretation</a:t>
             </a:r>
           </a:p>
           <a:p>
-            <a:pPr lvl="1"/>
+            <a:pPr lvl="2"/>
             <a:r>
               <a:rPr/>
               <a:t>Good for initial exploratory analysis</a:t>
             </a:r>
           </a:p>
           <a:p>
-            <a:pPr lvl="1"/>
+            <a:pPr lvl="2"/>
             <a:r>
               <a:rPr/>
               <a:t>Useful when distributions are very non-normal</a:t>
@@ -7871,16 +7951,11 @@
             </a:pPr>
             <a:r>
               <a:rPr b="1"/>
-              <a:t>Introduction</a:t>
-            </a:r>
-          </a:p>
-          <a:p>
-            <a:pPr lvl="0" indent="0" marL="0">
-              <a:buNone/>
-            </a:pPr>
-            <a:r>
-              <a:rPr/>
-              <a:t>This document outlines the workflow for Non-metric Multidimensional Scaling (NMDS). Unlike PCA, NMDS is rank-based and handles the “zero-rich” nature of ecological data much better.</a:t>
+              <a:t>Data - built in R and other plac</a:t>
+            </a:r>
+            <a:r>
+              <a:rPr/>
+              <a:t>es</a:t>
             </a:r>
           </a:p>
         </p:txBody>
@@ -9405,7 +9480,7 @@
             <a:pPr lvl="0"/>
             <a:r>
               <a:rPr b="1"/>
-              <a:t>What’s the Difference?</a:t>
+              <a:t>What’s the Difference? Three Scenarios</a:t>
             </a:r>
           </a:p>
           <a:p>
@@ -9442,14 +9517,7 @@
             <a:pPr lvl="2"/>
             <a:r>
               <a:rPr/>
-              <a:t>Uses actual squared distances</a:t>
-            </a:r>
-          </a:p>
-          <a:p>
-            <a:pPr lvl="2"/>
-            <a:r>
-              <a:rPr/>
-              <a:t>Partitions variance like ANOVA</a:t>
+              <a:t>Uses actual squared distances and partitions variance like ANOVA</a:t>
             </a:r>
           </a:p>
           <a:p>
@@ -9471,21 +9539,7 @@
             <a:pPr lvl="2"/>
             <a:r>
               <a:rPr/>
-              <a:t>Uses ranked distances</a:t>
-            </a:r>
-          </a:p>
-          <a:p>
-            <a:pPr lvl="2"/>
-            <a:r>
-              <a:rPr/>
-              <a:t>Compares rank distributions</a:t>
-            </a:r>
-          </a:p>
-          <a:p>
-            <a:pPr lvl="0"/>
-            <a:r>
-              <a:rPr/>
-              <a:t>Three Critical Scenarios</a:t>
+              <a:t>Uses ranked distances to compares rank distributions</a:t>
             </a:r>
           </a:p>
           <a:p>
@@ -11149,7 +11203,7 @@
             </a:r>
             <a:r>
               <a:rPr/>
-              <a:t>: Visualize dissimilarity between objects in 2D/3D spac</a:t>
+              <a:t>: Visualize dissimilarity between objects in 2D/3D space</a:t>
             </a:r>
           </a:p>
           <a:p>
@@ -11171,7 +11225,7 @@
             </a:r>
             <a:r>
               <a:rPr/>
-              <a:t>: Iterative repositioning to minimize stress</a:t>
+              <a:t>: Iterative re-positioning to minimize stress</a:t>
             </a:r>
           </a:p>
           <a:p>
@@ -11357,14 +11411,36 @@
                 </a:r>
                 <a:r>
                   <a:rPr/>
-                  <a:t> is standard choice for community data because it handles zeros appropriately (joint absences don’t contribute to similarity)</a:t>
+                  <a:t> is standard choice for community data because it handles zeros appropriately (</a:t>
+                </a:r>
+                <a:r>
+                  <a:rPr b="1"/>
+                  <a:t>joint absences don’t contribute to similarity</a:t>
+                </a:r>
+                <a:r>
+                  <a:rPr/>
+                  <a:t>)</a:t>
                 </a:r>
               </a:p>
               <a:p>
                 <a:pPr lvl="1"/>
                 <a:r>
                   <a:rPr/>
-                  <a:t>bounded between 0 and 1, weights by abundance (not just presence/absence)</a:t>
+                  <a:t>bounded between 0 and 1</a:t>
+                </a:r>
+              </a:p>
+              <a:p>
+                <a:pPr lvl="1"/>
+                <a:r>
+                  <a:rPr/>
+                  <a:t>weights by abundance (not just presence/absence) - ignores joint absences entirely</a:t>
+                </a:r>
+              </a:p>
+              <a:p>
+                <a:pPr lvl="1"/>
+                <a:r>
+                  <a:rPr/>
+                  <a:t>Similarity is based only on what’s actually present and shared between sites</a:t>
                 </a:r>
               </a:p>
               <a:p>
@@ -11615,33 +11691,42 @@
               <a:p>
                 <a:pPr lvl="0"/>
                 <a:r>
-                  <a:rPr/>
-                  <a:t>numerator sums up the absolute differences in abundance for each species between two sites</a:t>
+                  <a:rPr b="1"/>
+                  <a:t>numerator sums up the </a:t>
+                </a:r>
+                <a:r>
+                  <a:rPr b="1" u="sng"/>
+                  <a:t>absolute differences in abundance</a:t>
+                </a:r>
+                <a:r>
+                  <a:rPr b="1"/>
+                  <a:t> for each species between two sites</a:t>
+                </a:r>
+              </a:p>
+              <a:p>
+                <a:pPr lvl="0"/>
+                <a:r>
+                  <a:rPr b="1"/>
+                  <a:t>denominator sums up the </a:t>
+                </a:r>
+                <a:r>
+                  <a:rPr b="1" u="sng"/>
+                  <a:t>total abundance</a:t>
+                </a:r>
+                <a:r>
+                  <a:rPr b="1"/>
+                  <a:t> at both sites</a:t>
                 </a:r>
               </a:p>
               <a:p>
                 <a:pPr lvl="0"/>
                 <a:r>
                   <a:rPr/>
-                  <a:t>denominator sums up the total abundance at both sites</a:t>
+                  <a:t>Bray-Curtis asks: </a:t>
                 </a:r>
-              </a:p>
-              <a:p>
-                <a:pPr lvl="0"/>
-                <a:r>
-                  <a:rPr/>
-                  <a:t>Bray-Curtis asks: “Of all the individuals at these two sites, what proportion would need to be moved to make the sites identical?”</a:t>
-                </a:r>
-              </a:p>
-              <a:p>
-                <a:pPr lvl="0"/>
                 <a:r>
                   <a:rPr b="1"/>
-                  <a:t>Bray-Curtis</a:t>
-                </a:r>
-                <a:r>
-                  <a:rPr/>
-                  <a:t> ignores joint absences entirely. Similarity is based only on what’s actually present and shared between sites.</a:t>
+                  <a:t>“Of all the individuals at these two sites, what proportion would need to be moved to make the sites identical?”</a:t>
                 </a:r>
               </a:p>
             </p:txBody>
@@ -11732,7 +11817,7 @@
             <a:pPr lvl="1"/>
             <a:r>
               <a:rPr/>
-              <a:t>so that </a:t>
+              <a:t>so </a:t>
             </a:r>
             <a:r>
               <a:rPr b="1"/>
@@ -11901,7 +11986,11 @@
             </a:r>
             <a:r>
               <a:rPr/>
-              <a:t> = difference between original distances and ordination distances</a:t>
+              <a:t> = </a:t>
+            </a:r>
+            <a:r>
+              <a:rPr b="1"/>
+              <a:t>difference between original distances and ordination distances</a:t>
             </a:r>
           </a:p>
           <a:p>
@@ -12037,9 +12126,12 @@
         </p:nvSpPr>
         <p:spPr>
           <a:xfrm>
-            <a:off x="139485" y="78119"/>
-            <a:ext cx="8229600" cy="607682"/>
+            <a:off x="0" y="0"/>
+            <a:ext cx="9144000" cy="602780"/>
           </a:xfrm>
+          <a:solidFill>
+            <a:srgbClr val="70121D"/>
+          </a:solidFill>
         </p:spPr>
         <p:txBody>
           <a:bodyPr/>
@@ -12057,12 +12149,12 @@
       </p:sp>
       <p:sp>
         <p:nvSpPr>
-          <p:cNvPr id="3" name="Text Placeholder 2"/>
-          <p:cNvSpPr>
-            <a:spLocks noGrp="1"/>
-          </p:cNvSpPr>
-          <p:nvPr>
-            <p:ph idx="1" type="body"/>
+          <p:cNvPr id="3" name="Content Placeholder 2"/>
+          <p:cNvSpPr>
+            <a:spLocks noGrp="1"/>
+          </p:cNvSpPr>
+          <p:nvPr>
+            <p:ph idx="1" sz="half"/>
           </p:nvPr>
         </p:nvSpPr>
         <p:spPr/>
@@ -12091,7 +12183,7 @@
             <a:pPr lvl="1"/>
             <a:r>
               <a:rPr/>
-              <a:t>measures disagreement between original dissimilarities and distances in the ordination</a:t>
+              <a:t>measures disagreement between original dissimilarities and distances in ordination</a:t>
             </a:r>
           </a:p>
           <a:p>
@@ -12151,7 +12243,7 @@
             <a:pPr lvl="1"/>
             <a:r>
               <a:rPr/>
-              <a:t>shows relationship between original dissimilarities (x-axis) and ordination distances (y-axis), with a fitted monotonic line.</a:t>
+              <a:t>shows relationship between original dissimilarities (x-axis) and ordination distances (y-axis) with a fitted monotonic line</a:t>
             </a:r>
           </a:p>
           <a:p>
@@ -12166,98 +12258,13 @@
             <a:r>
               <a:rPr/>
               <a:t>Scatter indicates loss of information.</a:t>
-            </a:r>
-          </a:p>
-        </p:txBody>
-      </p:sp>
-      <p:sp>
-        <p:nvSpPr>
-          <p:cNvPr id="5" name="Text Placeholder 4"/>
-          <p:cNvSpPr>
-            <a:spLocks noGrp="1"/>
-          </p:cNvSpPr>
-          <p:nvPr>
-            <p:ph idx="3" sz="quarter" type="body"/>
-          </p:nvPr>
-        </p:nvSpPr>
-        <p:spPr/>
-        <p:txBody>
-          <a:bodyPr/>
-          <a:lstStyle/>
-          <a:p>
-            <a:pPr lvl="0" indent="0">
-              <a:buNone/>
-            </a:pPr>
-            <a:r>
-              <a:rPr>
-                <a:solidFill>
-                  <a:srgbClr val="5E5E5E"/>
-                </a:solidFill>
-                <a:latin typeface="Courier"/>
-              </a:rPr>
-              <a:t># Create Shepard diagram</a:t>
-            </a:r>
-            <a:br/>
-            <a:r>
-              <a:rPr>
-                <a:solidFill>
-                  <a:srgbClr val="4758AB"/>
-                </a:solidFill>
-                <a:latin typeface="Courier"/>
-              </a:rPr>
-              <a:t>stressplot</a:t>
-            </a:r>
-            <a:r>
-              <a:rPr>
-                <a:solidFill>
-                  <a:srgbClr val="003B4F"/>
-                </a:solidFill>
-                <a:latin typeface="Courier"/>
-              </a:rPr>
-              <a:t>(fish_nmds, </a:t>
-            </a:r>
-            <a:r>
-              <a:rPr>
-                <a:solidFill>
-                  <a:srgbClr val="657422"/>
-                </a:solidFill>
-                <a:latin typeface="Courier"/>
-              </a:rPr>
-              <a:t>main =</a:t>
-            </a:r>
-            <a:r>
-              <a:rPr>
-                <a:solidFill>
-                  <a:srgbClr val="003B4F"/>
-                </a:solidFill>
-                <a:latin typeface="Courier"/>
-              </a:rPr>
-              <a:t> </a:t>
-            </a:r>
-            <a:r>
-              <a:rPr>
-                <a:solidFill>
-                  <a:srgbClr val="20794D"/>
-                </a:solidFill>
-                <a:latin typeface="Courier"/>
-              </a:rPr>
-              <a:t>"Shepard Diagram for Fish NMDS"</a:t>
-            </a:r>
-            <a:r>
-              <a:rPr>
-                <a:solidFill>
-                  <a:srgbClr val="003B4F"/>
-                </a:solidFill>
-                <a:latin typeface="Courier"/>
-              </a:rPr>
-              <a:t>)</a:t>
             </a:r>
           </a:p>
         </p:txBody>
       </p:sp>
       <p:pic>
         <p:nvPicPr>
-          <p:cNvPr descr="18_01_lecture_powerpoint_files/figure-pptx/shepard-diagram-1.png" id="0" name="Picture 1"/>
+          <p:cNvPr descr="18_01_lecture_powerpoint_files/figure-pptx/shepard-diagram_1-1.png" id="0" name="Picture 1"/>
           <p:cNvPicPr>
             <a:picLocks noGrp="1" noChangeAspect="1"/>
           </p:cNvPicPr>
@@ -12271,8 +12278,8 @@
         </p:blipFill>
         <p:spPr bwMode="auto">
           <a:xfrm>
-            <a:off x="4749800" y="1676400"/>
-            <a:ext cx="4038600" cy="2527300"/>
+            <a:off x="6121400" y="2044700"/>
+            <a:ext cx="2781300" cy="1714500"/>
           </a:xfrm>
           <a:prstGeom prst="rect">
             <a:avLst/>
